--- a/report/AdaptiveFace_presentation.pptx
+++ b/report/AdaptiveFace_presentation.pptx
@@ -4685,7 +4685,7 @@
                 </a:solidFill>
                 <a:latin typeface="Calibri"/>
               </a:rPr>
-              <a:t>•  Multi-template enrollment with synthetic masks wins on every metric: rank-1 76.8 → 77.4 %, EER 9.8 → 8.7 %, masked-only rank-1 51.9 → 52.7 %. Small but consistent.</a:t>
+              <a:t>•  Multi-template enrollment with synthetic masks wins on every metric (multi_max): rank-1 76.8 → 77.4 %, EER 9.8 → 9.1 %, masked-only rank-1 51.9 → 52.7 %. multi_adaptive reaches the lowest EER overall, 8.7 %. Small but consistent.</a:t>
             </a:r>
           </a:p>
         </p:txBody>
